--- a/Sem 4/IDS/IDS-Module3.pptx
+++ b/Sem 4/IDS/IDS-Module3.pptx
@@ -22249,8 +22249,8 @@
           </a:ln>
         </p:spPr>
       </p:pic>
-      <mc:AlternateContent xmlns:mc="http://schemas.openxmlformats.org/markup-compatibility/2006">
-        <mc:Choice xmlns:p14="http://schemas.microsoft.com/office/powerpoint/2010/main" Requires="p14">
+      <mc:AlternateContent xmlns:mc="http://schemas.openxmlformats.org/markup-compatibility/2006" xmlns:p14="http://schemas.microsoft.com/office/powerpoint/2010/main">
+        <mc:Choice Requires="p14">
           <p:contentPart p14:bwMode="auto" r:id="rId5">
             <p14:nvContentPartPr>
               <p14:cNvPr id="2" name="Ink 1">
@@ -22269,7 +22269,7 @@
             </p14:xfrm>
           </p:contentPart>
         </mc:Choice>
-        <mc:Fallback>
+        <mc:Fallback xmlns="">
           <p:pic>
             <p:nvPicPr>
               <p:cNvPr id="2" name="Ink 1">
@@ -22300,8 +22300,8 @@
           </p:pic>
         </mc:Fallback>
       </mc:AlternateContent>
-      <mc:AlternateContent xmlns:mc="http://schemas.openxmlformats.org/markup-compatibility/2006">
-        <mc:Choice xmlns:p14="http://schemas.microsoft.com/office/powerpoint/2010/main" Requires="p14">
+      <mc:AlternateContent xmlns:mc="http://schemas.openxmlformats.org/markup-compatibility/2006" xmlns:p14="http://schemas.microsoft.com/office/powerpoint/2010/main">
+        <mc:Choice Requires="p14">
           <p:contentPart p14:bwMode="auto" r:id="rId7">
             <p14:nvContentPartPr>
               <p14:cNvPr id="3" name="Ink 2">
@@ -22320,7 +22320,7 @@
             </p14:xfrm>
           </p:contentPart>
         </mc:Choice>
-        <mc:Fallback>
+        <mc:Fallback xmlns="">
           <p:pic>
             <p:nvPicPr>
               <p:cNvPr id="3" name="Ink 2">
